--- a/PowerPoint sharing/ESP32_Lua_LLM_Architecture.pptx
+++ b/PowerPoint sharing/ESP32_Lua_LLM_Architecture.pptx
@@ -896,7 +896,7 @@
           <a:p>
             <a:r>
               <a:rPr lang="en-US" dirty="0"/>
-              <a:t>One-sentence pitch: a $5 ESP32-S3 sniffs BLE and runs Lua; a Python host application puts an LLM in the loop. Everything in this deck is live-verified on hardware. v1.1.0 released; stage 6 (the agent platform) is the current branch.</a:t>
+              <a:t>One-sentence pitch: a $5 ESP32-S3 bridges BLE devices to the PC and runs Lua; a Python host application puts an LLM in the loop. Everything in this deck is live-verified on hardware. v1.1.0 released; stage 6 (the agent platform) is the current branch.</a:t>
             </a:r>
             <a:endParaRPr lang="en-US" dirty="0"/>
           </a:p>
@@ -1600,7 +1600,7 @@
           <a:p>
             <a:r>
               <a:rPr lang="en-US" dirty="0"/>
-              <a:t>Close on trajectory: M2 makes tools persistent, M3 turns the dongle into an actor, M4 makes the LLM integration native. Then the one-liner and the numbers strip. Q&amp;A prompts: what would you sniff first?</a:t>
+              <a:t>Close on trajectory: M2 makes tools persistent, M3 turns the dongle into an actor, M4 makes the LLM integration native. Then the one-liner and the numbers strip. Q&amp;A prompts: which device would you bridge first?</a:t>
             </a:r>
             <a:endParaRPr lang="en-US" dirty="0"/>
           </a:p>
@@ -2853,7 +2853,7 @@
                 <a:ea typeface="Segoe UI" pitchFamily="34" charset="-122"/>
                 <a:cs typeface="Segoe UI" pitchFamily="34" charset="-120"/>
               </a:rPr>
-              <a:t>Passive sniffing, on-device Lua scripting, and a host-side agent that reads the traffic, writes its own tools — and ships them to the dongle over USB.</a:t>
+              <a:t>BLE bridging with on-device Lua scripting, and a host-side agent that reads the data, writes its own tools — and ships them to the dongle over USB.</a:t>
             </a:r>
             <a:endParaRPr lang="en-US" sz="1600" dirty="0"/>
           </a:p>
@@ -10837,7 +10837,7 @@
                 <a:ea typeface="Segoe UI" pitchFamily="34" charset="-122"/>
                 <a:cs typeface="Segoe UI" pitchFamily="34" charset="-120"/>
               </a:rPr>
-              <a:t>Sniffing BLE is heavy</a:t>
+              <a:t>Getting inside BLE is heavy</a:t>
             </a:r>
             <a:endParaRPr lang="en-US" sz="1550" dirty="0"/>
           </a:p>
